--- a/dist/초4/사회·역사/지도와지역/초4_사회·역사_지도와지역_02_촌락과도시_학생용.pptx
+++ b/dist/초4/사회·역사/지도와지역/초4_사회·역사_지도와지역_02_촌락과도시_학생용.pptx
@@ -120,13 +120,13 @@
   <p:extLst>
     <p:ext uri="{521415D9-36F7-43E2-AB2F-B90AF26B5E84}">
       <p14:sectionLst xmlns:p14="http://schemas.microsoft.com/office/powerpoint/2010/main">
-        <p14:section name="도입" id="{15dab4f0-6541-ffb0-e1f5-af0bd01703e5}">
+        <p14:section name="도입" id="{20eb6569-905d-26f8-9a76-875395a2dc56}">
           <p14:sldIdLst>
             <p14:sldId id="256"/>
             <p14:sldId id="257"/>
           </p14:sldIdLst>
         </p14:section>
-        <p14:section name="개념" id="{3e5e01dd-e6ea-24ff-e962-dfdce686af81}">
+        <p14:section name="개념" id="{0940f621-4773-fc67-4f2d-40665b46d7aa}">
           <p14:sldIdLst>
             <p14:sldId id="258"/>
             <p14:sldId id="259"/>
@@ -134,7 +134,7 @@
             <p14:sldId id="263"/>
           </p14:sldIdLst>
         </p14:section>
-        <p14:section name="연습" id="{1ca7aa27-61d4-8b92-40d1-9dcdaacd6935}">
+        <p14:section name="연습" id="{9766eef2-f989-639b-bf25-9b3d8535c11d}">
           <p14:sldIdLst>
             <p14:sldId id="260"/>
             <p14:sldId id="262"/>
@@ -142,30 +142,30 @@
             <p14:sldId id="265"/>
           </p14:sldIdLst>
         </p14:section>
-        <p14:section name="개념" id="{4c280a93-b692-c8ff-9208-0fcf8a75784c}">
+        <p14:section name="개념" id="{0fcbd866-7755-6825-4d82-6e97fd77d482}">
           <p14:sldIdLst/>
         </p14:section>
-        <p14:section name="연습" id="{c92bca1f-d8be-0f50-4da1-42c20497d021}">
+        <p14:section name="연습" id="{069eb9ab-c32d-2747-82ac-b8b01cbda7d9}">
           <p14:sldIdLst/>
         </p14:section>
-        <p14:section name="개념" id="{dde057ac-388d-2652-b596-7f734677c401}">
+        <p14:section name="개념" id="{8cc54442-cf4e-9ceb-dbf2-20b8b5a45820}">
           <p14:sldIdLst/>
         </p14:section>
-        <p14:section name="연습" id="{bb269585-b933-3e4b-1a74-52227f95cb0c}">
+        <p14:section name="연습" id="{25f68e75-d78f-4cb0-683d-ec5a2f49aae9}">
           <p14:sldIdLst/>
         </p14:section>
-        <p14:section name="확인" id="{aa9366f3-b6f4-aab0-ab09-37bd50a58970}">
+        <p14:section name="확인" id="{c9400cfd-5bbf-3745-70b1-107d2d7cca6a}">
           <p14:sldIdLst>
             <p14:sldId id="266"/>
             <p14:sldId id="267"/>
           </p14:sldIdLst>
         </p14:section>
-        <p14:section name="정리" id="{2a8f498b-45d4-8b7e-545e-6a199f5d8849}">
+        <p14:section name="정리" id="{745d5249-0dc6-a388-7522-699bfd7438e0}">
           <p14:sldIdLst>
             <p14:sldId id="268"/>
           </p14:sldIdLst>
         </p14:section>
-        <p14:section name="보충" id="{1688e19a-7271-fbba-b231-6582bddfd497}">
+        <p14:section name="보충" id="{8b04b0ab-f695-ca81-9e48-53745002de82}">
           <p14:sldIdLst>
             <p14:sldId id="269"/>
           </p14:sldIdLst>

--- a/dist/초4/사회·역사/지도와지역/초4_사회·역사_지도와지역_02_촌락과도시_학생용.pptx
+++ b/dist/초4/사회·역사/지도와지역/초4_사회·역사_지도와지역_02_촌락과도시_학생용.pptx
@@ -120,13 +120,13 @@
   <p:extLst>
     <p:ext uri="{521415D9-36F7-43E2-AB2F-B90AF26B5E84}">
       <p14:sectionLst xmlns:p14="http://schemas.microsoft.com/office/powerpoint/2010/main">
-        <p14:section name="도입" id="{20eb6569-905d-26f8-9a76-875395a2dc56}">
+        <p14:section name="도입" id="{f08e7ea0-7cd9-22e5-60b6-6142d774cbb7}">
           <p14:sldIdLst>
             <p14:sldId id="256"/>
             <p14:sldId id="257"/>
           </p14:sldIdLst>
         </p14:section>
-        <p14:section name="개념" id="{0940f621-4773-fc67-4f2d-40665b46d7aa}">
+        <p14:section name="개념" id="{c1d3638c-5834-7246-1532-744c69e56fec}">
           <p14:sldIdLst>
             <p14:sldId id="258"/>
             <p14:sldId id="259"/>
@@ -134,7 +134,7 @@
             <p14:sldId id="263"/>
           </p14:sldIdLst>
         </p14:section>
-        <p14:section name="연습" id="{9766eef2-f989-639b-bf25-9b3d8535c11d}">
+        <p14:section name="연습" id="{009fb39b-1042-3940-8d59-aadd676bf8f3}">
           <p14:sldIdLst>
             <p14:sldId id="260"/>
             <p14:sldId id="262"/>
@@ -142,30 +142,30 @@
             <p14:sldId id="265"/>
           </p14:sldIdLst>
         </p14:section>
-        <p14:section name="개념" id="{0fcbd866-7755-6825-4d82-6e97fd77d482}">
+        <p14:section name="개념" id="{ac511e97-3a27-88c5-cf03-9c0fe28d9354}">
           <p14:sldIdLst/>
         </p14:section>
-        <p14:section name="연습" id="{069eb9ab-c32d-2747-82ac-b8b01cbda7d9}">
+        <p14:section name="연습" id="{9eff3694-ff97-0987-a588-d0a8c5a813c7}">
           <p14:sldIdLst/>
         </p14:section>
-        <p14:section name="개념" id="{8cc54442-cf4e-9ceb-dbf2-20b8b5a45820}">
+        <p14:section name="개념" id="{84a7c106-2c00-0e47-c7ff-b980ead20992}">
           <p14:sldIdLst/>
         </p14:section>
-        <p14:section name="연습" id="{25f68e75-d78f-4cb0-683d-ec5a2f49aae9}">
+        <p14:section name="연습" id="{efba6e52-152a-2662-597b-37d30ad96a72}">
           <p14:sldIdLst/>
         </p14:section>
-        <p14:section name="확인" id="{c9400cfd-5bbf-3745-70b1-107d2d7cca6a}">
+        <p14:section name="확인" id="{b651da62-a882-2fea-5883-80f4f1ffe9b2}">
           <p14:sldIdLst>
             <p14:sldId id="266"/>
             <p14:sldId id="267"/>
           </p14:sldIdLst>
         </p14:section>
-        <p14:section name="정리" id="{745d5249-0dc6-a388-7522-699bfd7438e0}">
+        <p14:section name="정리" id="{84591d18-0fe6-8809-02e0-9f9ef341e5dc}">
           <p14:sldIdLst>
             <p14:sldId id="268"/>
           </p14:sldIdLst>
         </p14:section>
-        <p14:section name="보충" id="{8b04b0ab-f695-ca81-9e48-53745002de82}">
+        <p14:section name="보충" id="{671e4f35-0ef4-6b04-3699-d20d31dda349}">
           <p14:sldIdLst>
             <p14:sldId id="269"/>
           </p14:sldIdLst>
